--- a/classes/parte-13-seguridad-movil-iot-e-inalambrica/261-seguridad-de-android-arquitectura/clase-261-presentacion.pptx
+++ b/classes/parte-13-seguridad-movil-iot-e-inalambrica/261-seguridad-de-android-arquitectura/clase-261-presentacion.pptx
@@ -17,6 +17,10 @@
     <p:sldId id="265" r:id="rId16"/>
     <p:sldId id="266" r:id="rId17"/>
     <p:sldId id="267" r:id="rId18"/>
+    <p:sldId id="268" r:id="rId19"/>
+    <p:sldId id="269" r:id="rId20"/>
+    <p:sldId id="270" r:id="rId21"/>
+    <p:sldId id="271" r:id="rId22"/>
   </p:sldIdLst>
   <p:sldSz cx="9144000" cy="6858000" type="screen4x3"/>
   <p:notesSz cx="6858000" cy="9144000"/>
@@ -3198,7 +3202,7 @@
                   <a:srgbClr val="0B3D2E"/>
                 </a:solidFill>
               </a:rPr>
-              <a:t>⚠️ Errores comunes</a:t>
+              <a:t>🧪 Laboratorio guiado</a:t>
             </a:r>
           </a:p>
         </p:txBody>
@@ -3236,67 +3240,97 @@
                   <a:srgbClr val="22282E"/>
                 </a:solidFill>
               </a:rPr>
-              <a:t>•  adb: no devices/emulators found — El servidor adb no ve el AVD; reinícialo con adb kill-server &amp;&amp; adb start-server</a:t>
-            </a:r>
-          </a:p>
-          <a:p>
-            <a:pPr>
-              <a:spcAft>
-                <a:spcPts val="600"/>
-              </a:spcAft>
-            </a:pPr>
-            <a:r>
-              <a:rPr sz="1500">
-                <a:solidFill>
-                  <a:srgbClr val="22282E"/>
-                </a:solidFill>
-              </a:rPr>
-              <a:t>•  adbd cannot run as root in production builds — Imagen Play Store; usa una imagen Google APIs o de ingeniería</a:t>
-            </a:r>
-          </a:p>
-          <a:p>
-            <a:pPr>
-              <a:spcAft>
-                <a:spcPts val="600"/>
-              </a:spcAft>
-            </a:pPr>
-            <a:r>
-              <a:rPr sz="1500">
-                <a:solidFill>
-                  <a:srgbClr val="22282E"/>
-                </a:solidFill>
-              </a:rPr>
-              <a:t>•  Permission denied al leer /data/data — El sandbox lo impide sin root; usa un AVD rooteable</a:t>
-            </a:r>
-          </a:p>
-          <a:p>
-            <a:pPr>
-              <a:spcAft>
-                <a:spcPts val="600"/>
-              </a:spcAft>
-            </a:pPr>
-            <a:r>
-              <a:rPr sz="1500">
-                <a:solidFill>
-                  <a:srgbClr val="22282E"/>
-                </a:solidFill>
-              </a:rPr>
-              <a:t>•  getenforce devuelve Permissive — Imagen de desarrollo; en producción SELinux está en Enforcing</a:t>
-            </a:r>
-          </a:p>
-          <a:p>
-            <a:pPr>
-              <a:spcAft>
-                <a:spcPts val="600"/>
-              </a:spcAft>
-            </a:pPr>
-            <a:r>
-              <a:rPr sz="1500">
-                <a:solidFill>
-                  <a:srgbClr val="22282E"/>
-                </a:solidFill>
-              </a:rPr>
-              <a:t>•  Manifiesto ilegible tras apktool — Falta reconstruir recursos; usa aapt dump xmltree sobre el APK original</a:t>
+              <a:t>•  Levanta un AVD con API 30+ e imagen Google APIs. Arráncalo desde Android Studio o con emulator -avd &lt;nombre&gt; -writable-system.</a:t>
+            </a:r>
+          </a:p>
+          <a:p>
+            <a:pPr>
+              <a:spcAft>
+                <a:spcPts val="600"/>
+              </a:spcAft>
+            </a:pPr>
+            <a:r>
+              <a:rPr sz="1500">
+                <a:solidFill>
+                  <a:srgbClr val="22282E"/>
+                </a:solidFill>
+              </a:rPr>
+              <a:t>•  Inspecciona el sandbox: instala una app de prueba y localiza su UID: adb shell pm list packages -U | grep &lt;paquete&gt;. Observa que su directorio /data/data/&lt;paquete&gt; no es legible por otras apps.</a:t>
+            </a:r>
+          </a:p>
+          <a:p>
+            <a:pPr>
+              <a:spcAft>
+                <a:spcPts val="600"/>
+              </a:spcAft>
+            </a:pPr>
+            <a:r>
+              <a:rPr sz="1500">
+                <a:solidFill>
+                  <a:srgbClr val="22282E"/>
+                </a:solidFill>
+              </a:rPr>
+              <a:t>•  Revisa SELinux: ejecuta adb shell getenforce. Consulta el contexto de un proceso con adb shell ps -Z.</a:t>
+            </a:r>
+          </a:p>
+          <a:p>
+            <a:pPr>
+              <a:spcAft>
+                <a:spcPts val="600"/>
+              </a:spcAft>
+            </a:pPr>
+            <a:r>
+              <a:rPr sz="1500">
+                <a:solidFill>
+                  <a:srgbClr val="22282E"/>
+                </a:solidFill>
+              </a:rPr>
+              <a:t>•  Enumera permisos de una app instalada: adb shell dumpsys package &lt;paquete&gt; | sed -n '/requested permissions/,/install permissions/p'.</a:t>
+            </a:r>
+          </a:p>
+          <a:p>
+            <a:pPr>
+              <a:spcAft>
+                <a:spcPts val="600"/>
+              </a:spcAft>
+            </a:pPr>
+            <a:r>
+              <a:rPr sz="1500">
+                <a:solidFill>
+                  <a:srgbClr val="22282E"/>
+                </a:solidFill>
+              </a:rPr>
+              <a:t>•  Examina componentes exportados: extrae el APK (adb shell pm path &lt;paquete&gt; + adb pull) y ábrelo con aapt dump xmltree base.apk AndroidManifest.xml buscando android:exported="true".</a:t>
+            </a:r>
+          </a:p>
+          <a:p>
+            <a:pPr>
+              <a:spcAft>
+                <a:spcPts val="600"/>
+              </a:spcAft>
+            </a:pPr>
+            <a:r>
+              <a:rPr sz="1500">
+                <a:solidFill>
+                  <a:srgbClr val="22282E"/>
+                </a:solidFill>
+              </a:rPr>
+              <a:t>•  Explora el Keystore: con una app de ejemplo que genere una clave, observa que el material no aparece en el sistema de ficheros de la app.</a:t>
+            </a:r>
+          </a:p>
+          <a:p>
+            <a:pPr>
+              <a:spcAft>
+                <a:spcPts val="600"/>
+              </a:spcAft>
+            </a:pPr>
+            <a:r>
+              <a:rPr sz="1500">
+                <a:solidFill>
+                  <a:srgbClr val="22282E"/>
+                </a:solidFill>
+              </a:rPr>
+              <a:t>•  Rootea el emulador: adb root (en imágenes de ingeniería) y comprueba cómo ahora adb shell accede a /data/data/ de cualquier app: constata que el root anula el sandbox.</a:t>
             </a:r>
           </a:p>
         </p:txBody>
@@ -3347,7 +3381,7 @@
                   <a:srgbClr val="0B3D2E"/>
                 </a:solidFill>
               </a:rPr>
-              <a:t>❓ Preguntas frecuentes</a:t>
+              <a:t>✍️ Ejercicios</a:t>
             </a:r>
           </a:p>
         </p:txBody>
@@ -3385,82 +3419,82 @@
                   <a:srgbClr val="22282E"/>
                 </a:solidFill>
               </a:rPr>
-              <a:t>•  ❓ ¿El sandbox de Android me protege aunque instale una app maliciosa?</a:t>
-            </a:r>
-          </a:p>
-          <a:p>
-            <a:pPr>
-              <a:spcAft>
-                <a:spcPts val="600"/>
-              </a:spcAft>
-            </a:pPr>
-            <a:r>
-              <a:rPr sz="1500">
-                <a:solidFill>
-                  <a:srgbClr val="22282E"/>
-                </a:solidFill>
-              </a:rPr>
-              <a:t>•  Limita su acceso a otras apps y al sistema, pero la app maliciosa sigue pudiendo abusar de los permisos que le concedas y de componentes mal expuestos por otras apps.</a:t>
-            </a:r>
-          </a:p>
-          <a:p>
-            <a:pPr>
-              <a:spcAft>
-                <a:spcPts val="600"/>
-              </a:spcAft>
-            </a:pPr>
-            <a:r>
-              <a:rPr sz="1500">
-                <a:solidFill>
-                  <a:srgbClr val="22282E"/>
-                </a:solidFill>
-              </a:rPr>
-              <a:t>•  ❓ ¿Rootear siempre debilita la seguridad?</a:t>
-            </a:r>
-          </a:p>
-          <a:p>
-            <a:pPr>
-              <a:spcAft>
-                <a:spcPts val="600"/>
-              </a:spcAft>
-            </a:pPr>
-            <a:r>
-              <a:rPr sz="1500">
-                <a:solidFill>
-                  <a:srgbClr val="22282E"/>
-                </a:solidFill>
-              </a:rPr>
-              <a:t>•  Sí: rompe el sandbox, permite a apps con root leer datos de cualquier otra y desactiva garantías del arranque verificado. En laboratorio es útil; en un teléfono personal es un riesgo real.</a:t>
-            </a:r>
-          </a:p>
-          <a:p>
-            <a:pPr>
-              <a:spcAft>
-                <a:spcPts val="600"/>
-              </a:spcAft>
-            </a:pPr>
-            <a:r>
-              <a:rPr sz="1500">
-                <a:solidFill>
-                  <a:srgbClr val="22282E"/>
-                </a:solidFill>
-              </a:rPr>
-              <a:t>•  ❓ ¿Dónde deberían guardarse las claves criptográficas de una app?</a:t>
-            </a:r>
-          </a:p>
-          <a:p>
-            <a:pPr>
-              <a:spcAft>
-                <a:spcPts val="600"/>
-              </a:spcAft>
-            </a:pPr>
-            <a:r>
-              <a:rPr sz="1500">
-                <a:solidFill>
-                  <a:srgbClr val="22282E"/>
-                </a:solidFill>
-              </a:rPr>
-              <a:t>•  En el Android Keystore respaldado por hardware, nunca en SharedPreferences ni hardcodeadas en el código.</a:t>
+              <a:t>•  Dibuja un diagrama de la pila Android indicando en qué capa vive cada control de seguridad.</a:t>
+            </a:r>
+          </a:p>
+          <a:p>
+            <a:pPr>
+              <a:spcAft>
+                <a:spcPts val="600"/>
+              </a:spcAft>
+            </a:pPr>
+            <a:r>
+              <a:rPr sz="1500">
+                <a:solidFill>
+                  <a:srgbClr val="22282E"/>
+                </a:solidFill>
+              </a:rPr>
+              <a:t>•  Lista cinco permisos "peligrosos" y explica qué dato o hardware protege cada uno.</a:t>
+            </a:r>
+          </a:p>
+          <a:p>
+            <a:pPr>
+              <a:spcAft>
+                <a:spcPts val="600"/>
+              </a:spcAft>
+            </a:pPr>
+            <a:r>
+              <a:rPr sz="1500">
+                <a:solidFill>
+                  <a:srgbClr val="22282E"/>
+                </a:solidFill>
+              </a:rPr>
+              <a:t>•  Compara SharedPreferences en claro vs. EncryptedSharedPreferences y di cuándo usar cada uno.</a:t>
+            </a:r>
+          </a:p>
+          <a:p>
+            <a:pPr>
+              <a:spcAft>
+                <a:spcPts val="600"/>
+              </a:spcAft>
+            </a:pPr>
+            <a:r>
+              <a:rPr sz="1500">
+                <a:solidFill>
+                  <a:srgbClr val="22282E"/>
+                </a:solidFill>
+              </a:rPr>
+              <a:t>•  Identifica en un APK real (propio) todos los componentes exported y clasifica su riesgo.</a:t>
+            </a:r>
+          </a:p>
+          <a:p>
+            <a:pPr>
+              <a:spcAft>
+                <a:spcPts val="600"/>
+              </a:spcAft>
+            </a:pPr>
+            <a:r>
+              <a:rPr sz="1500">
+                <a:solidFill>
+                  <a:srgbClr val="22282E"/>
+                </a:solidFill>
+              </a:rPr>
+              <a:t>•  Explica con tus palabras por qué SELinux mitiga una vulnerabilidad de escalada a root.</a:t>
+            </a:r>
+          </a:p>
+          <a:p>
+            <a:pPr>
+              <a:spcAft>
+                <a:spcPts val="600"/>
+              </a:spcAft>
+            </a:pPr>
+            <a:r>
+              <a:rPr sz="1500">
+                <a:solidFill>
+                  <a:srgbClr val="22282E"/>
+                </a:solidFill>
+              </a:rPr>
+              <a:t>•  Investiga la diferencia entre TEE y StrongBox para el respaldo del Keystore.</a:t>
             </a:r>
           </a:p>
         </p:txBody>
@@ -3511,7 +3545,7 @@
                   <a:srgbClr val="0B3D2E"/>
                 </a:solidFill>
               </a:rPr>
-              <a:t>🔗 Referencias</a:t>
+              <a:t>📝 Reto verificable</a:t>
             </a:r>
           </a:p>
         </p:txBody>
@@ -3549,6 +3583,408 @@
                   <a:srgbClr val="22282E"/>
                 </a:solidFill>
               </a:rPr>
+              <a:t>•  Toma una app de prueba (por ejemplo, una que tú compiles) y produce un inventario de superficie de ataque local: tabla con todos sus componentes, su estado exported, permisos requeridos y dónde…</a:t>
+            </a:r>
+          </a:p>
+        </p:txBody>
+      </p:sp>
+    </p:spTree>
+  </p:cSld>
+  <p:clrMapOvr>
+    <a:masterClrMapping/>
+  </p:clrMapOvr>
+</p:sld>
+</file>
+
+<file path=ppt/slides/slide13.xml><?xml version="1.0" encoding="utf-8"?>
+<p:sld xmlns:a="http://schemas.openxmlformats.org/drawingml/2006/main" xmlns:p="http://schemas.openxmlformats.org/presentationml/2006/main" xmlns:r="http://schemas.openxmlformats.org/officeDocument/2006/relationships">
+  <p:cSld>
+    <p:spTree>
+      <p:nvGrpSpPr>
+        <p:cNvPr id="1" name=""/>
+        <p:cNvGrpSpPr/>
+        <p:nvPr/>
+      </p:nvGrpSpPr>
+      <p:grpSpPr/>
+      <p:sp>
+        <p:nvSpPr>
+          <p:cNvPr id="2" name="TextBox 1"/>
+          <p:cNvSpPr txBox="1"/>
+          <p:nvPr/>
+        </p:nvSpPr>
+        <p:spPr>
+          <a:xfrm>
+            <a:off x="457200" y="320040"/>
+            <a:ext cx="8229600" cy="822960"/>
+          </a:xfrm>
+          <a:prstGeom prst="rect">
+            <a:avLst/>
+          </a:prstGeom>
+          <a:noFill/>
+        </p:spPr>
+        <p:txBody>
+          <a:bodyPr wrap="square">
+            <a:spAutoFit/>
+          </a:bodyPr>
+          <a:lstStyle/>
+          <a:p>
+            <a:r>
+              <a:rPr sz="2600" b="1">
+                <a:solidFill>
+                  <a:srgbClr val="0B3D2E"/>
+                </a:solidFill>
+              </a:rPr>
+              <a:t>⚠️ Errores comunes</a:t>
+            </a:r>
+          </a:p>
+        </p:txBody>
+      </p:sp>
+      <p:sp>
+        <p:nvSpPr>
+          <p:cNvPr id="3" name="TextBox 2"/>
+          <p:cNvSpPr txBox="1"/>
+          <p:nvPr/>
+        </p:nvSpPr>
+        <p:spPr>
+          <a:xfrm>
+            <a:off x="457200" y="1280160"/>
+            <a:ext cx="8229600" cy="4937760"/>
+          </a:xfrm>
+          <a:prstGeom prst="rect">
+            <a:avLst/>
+          </a:prstGeom>
+          <a:noFill/>
+        </p:spPr>
+        <p:txBody>
+          <a:bodyPr wrap="square">
+            <a:spAutoFit/>
+          </a:bodyPr>
+          <a:lstStyle/>
+          <a:p>
+            <a:pPr>
+              <a:spcAft>
+                <a:spcPts val="600"/>
+              </a:spcAft>
+            </a:pPr>
+            <a:r>
+              <a:rPr sz="1500">
+                <a:solidFill>
+                  <a:srgbClr val="22282E"/>
+                </a:solidFill>
+              </a:rPr>
+              <a:t>•  adb: no devices/emulators found — El servidor adb no ve el AVD; reinícialo con adb kill-server &amp;&amp; adb start-server</a:t>
+            </a:r>
+          </a:p>
+          <a:p>
+            <a:pPr>
+              <a:spcAft>
+                <a:spcPts val="600"/>
+              </a:spcAft>
+            </a:pPr>
+            <a:r>
+              <a:rPr sz="1500">
+                <a:solidFill>
+                  <a:srgbClr val="22282E"/>
+                </a:solidFill>
+              </a:rPr>
+              <a:t>•  adbd cannot run as root in production builds — Imagen Play Store; usa una imagen Google APIs o de ingeniería</a:t>
+            </a:r>
+          </a:p>
+          <a:p>
+            <a:pPr>
+              <a:spcAft>
+                <a:spcPts val="600"/>
+              </a:spcAft>
+            </a:pPr>
+            <a:r>
+              <a:rPr sz="1500">
+                <a:solidFill>
+                  <a:srgbClr val="22282E"/>
+                </a:solidFill>
+              </a:rPr>
+              <a:t>•  Permission denied al leer /data/data — El sandbox lo impide sin root; usa un AVD rooteable</a:t>
+            </a:r>
+          </a:p>
+          <a:p>
+            <a:pPr>
+              <a:spcAft>
+                <a:spcPts val="600"/>
+              </a:spcAft>
+            </a:pPr>
+            <a:r>
+              <a:rPr sz="1500">
+                <a:solidFill>
+                  <a:srgbClr val="22282E"/>
+                </a:solidFill>
+              </a:rPr>
+              <a:t>•  getenforce devuelve Permissive — Imagen de desarrollo; en producción SELinux está en Enforcing</a:t>
+            </a:r>
+          </a:p>
+          <a:p>
+            <a:pPr>
+              <a:spcAft>
+                <a:spcPts val="600"/>
+              </a:spcAft>
+            </a:pPr>
+            <a:r>
+              <a:rPr sz="1500">
+                <a:solidFill>
+                  <a:srgbClr val="22282E"/>
+                </a:solidFill>
+              </a:rPr>
+              <a:t>•  Manifiesto ilegible tras apktool — Falta reconstruir recursos; usa aapt dump xmltree sobre el APK original</a:t>
+            </a:r>
+          </a:p>
+        </p:txBody>
+      </p:sp>
+    </p:spTree>
+  </p:cSld>
+  <p:clrMapOvr>
+    <a:masterClrMapping/>
+  </p:clrMapOvr>
+</p:sld>
+</file>
+
+<file path=ppt/slides/slide14.xml><?xml version="1.0" encoding="utf-8"?>
+<p:sld xmlns:a="http://schemas.openxmlformats.org/drawingml/2006/main" xmlns:p="http://schemas.openxmlformats.org/presentationml/2006/main" xmlns:r="http://schemas.openxmlformats.org/officeDocument/2006/relationships">
+  <p:cSld>
+    <p:spTree>
+      <p:nvGrpSpPr>
+        <p:cNvPr id="1" name=""/>
+        <p:cNvGrpSpPr/>
+        <p:nvPr/>
+      </p:nvGrpSpPr>
+      <p:grpSpPr/>
+      <p:sp>
+        <p:nvSpPr>
+          <p:cNvPr id="2" name="TextBox 1"/>
+          <p:cNvSpPr txBox="1"/>
+          <p:nvPr/>
+        </p:nvSpPr>
+        <p:spPr>
+          <a:xfrm>
+            <a:off x="457200" y="320040"/>
+            <a:ext cx="8229600" cy="822960"/>
+          </a:xfrm>
+          <a:prstGeom prst="rect">
+            <a:avLst/>
+          </a:prstGeom>
+          <a:noFill/>
+        </p:spPr>
+        <p:txBody>
+          <a:bodyPr wrap="square">
+            <a:spAutoFit/>
+          </a:bodyPr>
+          <a:lstStyle/>
+          <a:p>
+            <a:r>
+              <a:rPr sz="2600" b="1">
+                <a:solidFill>
+                  <a:srgbClr val="0B3D2E"/>
+                </a:solidFill>
+              </a:rPr>
+              <a:t>❓ Preguntas frecuentes</a:t>
+            </a:r>
+          </a:p>
+        </p:txBody>
+      </p:sp>
+      <p:sp>
+        <p:nvSpPr>
+          <p:cNvPr id="3" name="TextBox 2"/>
+          <p:cNvSpPr txBox="1"/>
+          <p:nvPr/>
+        </p:nvSpPr>
+        <p:spPr>
+          <a:xfrm>
+            <a:off x="457200" y="1280160"/>
+            <a:ext cx="8229600" cy="4937760"/>
+          </a:xfrm>
+          <a:prstGeom prst="rect">
+            <a:avLst/>
+          </a:prstGeom>
+          <a:noFill/>
+        </p:spPr>
+        <p:txBody>
+          <a:bodyPr wrap="square">
+            <a:spAutoFit/>
+          </a:bodyPr>
+          <a:lstStyle/>
+          <a:p>
+            <a:pPr>
+              <a:spcAft>
+                <a:spcPts val="600"/>
+              </a:spcAft>
+            </a:pPr>
+            <a:r>
+              <a:rPr sz="1500">
+                <a:solidFill>
+                  <a:srgbClr val="22282E"/>
+                </a:solidFill>
+              </a:rPr>
+              <a:t>•  ❓ ¿El sandbox de Android me protege aunque instale una app maliciosa?</a:t>
+            </a:r>
+          </a:p>
+          <a:p>
+            <a:pPr>
+              <a:spcAft>
+                <a:spcPts val="600"/>
+              </a:spcAft>
+            </a:pPr>
+            <a:r>
+              <a:rPr sz="1500">
+                <a:solidFill>
+                  <a:srgbClr val="22282E"/>
+                </a:solidFill>
+              </a:rPr>
+              <a:t>•  Limita su acceso a otras apps y al sistema, pero la app maliciosa sigue pudiendo abusar de los permisos que le concedas y de componentes mal expuestos por otras apps.</a:t>
+            </a:r>
+          </a:p>
+          <a:p>
+            <a:pPr>
+              <a:spcAft>
+                <a:spcPts val="600"/>
+              </a:spcAft>
+            </a:pPr>
+            <a:r>
+              <a:rPr sz="1500">
+                <a:solidFill>
+                  <a:srgbClr val="22282E"/>
+                </a:solidFill>
+              </a:rPr>
+              <a:t>•  ❓ ¿Rootear cambia el modelo de seguridad?</a:t>
+            </a:r>
+          </a:p>
+          <a:p>
+            <a:pPr>
+              <a:spcAft>
+                <a:spcPts val="600"/>
+              </a:spcAft>
+            </a:pPr>
+            <a:r>
+              <a:rPr sz="1500">
+                <a:solidFill>
+                  <a:srgbClr val="22282E"/>
+                </a:solidFill>
+              </a:rPr>
+              <a:t>•  Sí. Introduce autoridad y software que pueden eludir controles y puede alterar garantías de arranque, según método y dispositivo. En laboratorio facilita observación, pero las conclusiones deben…</a:t>
+            </a:r>
+          </a:p>
+          <a:p>
+            <a:pPr>
+              <a:spcAft>
+                <a:spcPts val="600"/>
+              </a:spcAft>
+            </a:pPr>
+            <a:r>
+              <a:rPr sz="1500">
+                <a:solidFill>
+                  <a:srgbClr val="22282E"/>
+                </a:solidFill>
+              </a:rPr>
+              <a:t>•  ❓ ¿Dónde deberían guardarse las claves criptográficas de una app?</a:t>
+            </a:r>
+          </a:p>
+          <a:p>
+            <a:pPr>
+              <a:spcAft>
+                <a:spcPts val="600"/>
+              </a:spcAft>
+            </a:pPr>
+            <a:r>
+              <a:rPr sz="1500">
+                <a:solidFill>
+                  <a:srgbClr val="22282E"/>
+                </a:solidFill>
+              </a:rPr>
+              <a:t>•  En Android Keystore con las restricciones apropiadas y respaldo hardware cuando el dispositivo lo ofrezca. SharedPreferences puede almacenar configuración no secreta, pero no material de clave en…</a:t>
+            </a:r>
+          </a:p>
+        </p:txBody>
+      </p:sp>
+    </p:spTree>
+  </p:cSld>
+  <p:clrMapOvr>
+    <a:masterClrMapping/>
+  </p:clrMapOvr>
+</p:sld>
+</file>
+
+<file path=ppt/slides/slide15.xml><?xml version="1.0" encoding="utf-8"?>
+<p:sld xmlns:a="http://schemas.openxmlformats.org/drawingml/2006/main" xmlns:p="http://schemas.openxmlformats.org/presentationml/2006/main" xmlns:r="http://schemas.openxmlformats.org/officeDocument/2006/relationships">
+  <p:cSld>
+    <p:spTree>
+      <p:nvGrpSpPr>
+        <p:cNvPr id="1" name=""/>
+        <p:cNvGrpSpPr/>
+        <p:nvPr/>
+      </p:nvGrpSpPr>
+      <p:grpSpPr/>
+      <p:sp>
+        <p:nvSpPr>
+          <p:cNvPr id="2" name="TextBox 1"/>
+          <p:cNvSpPr txBox="1"/>
+          <p:nvPr/>
+        </p:nvSpPr>
+        <p:spPr>
+          <a:xfrm>
+            <a:off x="457200" y="320040"/>
+            <a:ext cx="8229600" cy="822960"/>
+          </a:xfrm>
+          <a:prstGeom prst="rect">
+            <a:avLst/>
+          </a:prstGeom>
+          <a:noFill/>
+        </p:spPr>
+        <p:txBody>
+          <a:bodyPr wrap="square">
+            <a:spAutoFit/>
+          </a:bodyPr>
+          <a:lstStyle/>
+          <a:p>
+            <a:r>
+              <a:rPr sz="2600" b="1">
+                <a:solidFill>
+                  <a:srgbClr val="0B3D2E"/>
+                </a:solidFill>
+              </a:rPr>
+              <a:t>🔗 Referencias</a:t>
+            </a:r>
+          </a:p>
+        </p:txBody>
+      </p:sp>
+      <p:sp>
+        <p:nvSpPr>
+          <p:cNvPr id="3" name="TextBox 2"/>
+          <p:cNvSpPr txBox="1"/>
+          <p:nvPr/>
+        </p:nvSpPr>
+        <p:spPr>
+          <a:xfrm>
+            <a:off x="457200" y="1280160"/>
+            <a:ext cx="8229600" cy="4937760"/>
+          </a:xfrm>
+          <a:prstGeom prst="rect">
+            <a:avLst/>
+          </a:prstGeom>
+          <a:noFill/>
+        </p:spPr>
+        <p:txBody>
+          <a:bodyPr wrap="square">
+            <a:spAutoFit/>
+          </a:bodyPr>
+          <a:lstStyle/>
+          <a:p>
+            <a:pPr>
+              <a:spcAft>
+                <a:spcPts val="600"/>
+              </a:spcAft>
+            </a:pPr>
+            <a:r>
+              <a:rPr sz="1500">
+                <a:solidFill>
+                  <a:srgbClr val="22282E"/>
+                </a:solidFill>
+              </a:rPr>
               <a:t>•  OWASP MASTG — Android Platform Overview: &lt;https://mas.owasp.org/MASTG/0x05a-Platform-Overview/&gt;</a:t>
             </a:r>
           </a:p>
@@ -3599,6 +4035,81 @@
           </a:p>
         </p:txBody>
       </p:sp>
+    </p:spTree>
+  </p:cSld>
+  <p:clrMapOvr>
+    <a:masterClrMapping/>
+  </p:clrMapOvr>
+</p:sld>
+</file>
+
+<file path=ppt/slides/slide16.xml><?xml version="1.0" encoding="utf-8"?>
+<p:sld xmlns:a="http://schemas.openxmlformats.org/drawingml/2006/main" xmlns:p="http://schemas.openxmlformats.org/presentationml/2006/main" xmlns:r="http://schemas.openxmlformats.org/officeDocument/2006/relationships">
+  <p:cSld>
+    <p:spTree>
+      <p:nvGrpSpPr>
+        <p:cNvPr id="1" name=""/>
+        <p:cNvGrpSpPr/>
+        <p:nvPr/>
+      </p:nvGrpSpPr>
+      <p:grpSpPr/>
+      <p:sp>
+        <p:nvSpPr>
+          <p:cNvPr id="2" name="TextBox 1"/>
+          <p:cNvSpPr txBox="1"/>
+          <p:nvPr/>
+        </p:nvSpPr>
+        <p:spPr>
+          <a:xfrm>
+            <a:off x="457200" y="274320"/>
+            <a:ext cx="8229600" cy="640080"/>
+          </a:xfrm>
+          <a:prstGeom prst="rect">
+            <a:avLst/>
+          </a:prstGeom>
+          <a:noFill/>
+        </p:spPr>
+        <p:txBody>
+          <a:bodyPr wrap="square">
+            <a:spAutoFit/>
+          </a:bodyPr>
+          <a:lstStyle/>
+          <a:p>
+            <a:r>
+              <a:rPr sz="2200" b="1">
+                <a:solidFill>
+                  <a:srgbClr val="0B3D2E"/>
+                </a:solidFill>
+              </a:rPr>
+              <a:t>Diagrama de la clase</a:t>
+            </a:r>
+          </a:p>
+        </p:txBody>
+      </p:sp>
+      <p:pic>
+        <p:nvPicPr>
+          <p:cNvPr id="3" name="Picture 2" descr="1fe8e43579029526.png"/>
+          <p:cNvPicPr>
+            <a:picLocks noChangeAspect="1"/>
+          </p:cNvPicPr>
+          <p:nvPr/>
+        </p:nvPicPr>
+        <p:blipFill>
+          <a:blip r:embed="rId2"/>
+          <a:stretch>
+            <a:fillRect/>
+          </a:stretch>
+        </p:blipFill>
+        <p:spPr>
+          <a:xfrm>
+            <a:off x="2517086" y="1097280"/>
+            <a:ext cx="4109827" cy="5303520"/>
+          </a:xfrm>
+          <a:prstGeom prst="rect">
+            <a:avLst/>
+          </a:prstGeom>
+        </p:spPr>
+      </p:pic>
     </p:spTree>
   </p:cSld>
   <p:clrMapOvr>
@@ -3683,7 +4194,7 @@
                   <a:srgbClr val="22282E"/>
                 </a:solidFill>
               </a:rPr>
-              <a:t>•  Comprender el modelo de seguridad de Android de extremo a extremo —desde el kernel Linux y SELinux hasta el sandbox de aplicaciones, el modelo de permisos y el almacenamiento de claves— para poder razonar sobre qué protege el sistema, dónde están sus límites y qué asunciones rompe un dispositivo rooteado. Esta clase es la base conceptual sin la cual el pentest de la siguiente clase sería mera repetición de comandos.</a:t>
+              <a:t>•  Comprender el modelo de seguridad de Android de extremo a extremo —desde el kernel Linux y SELinux hasta el sandbox de aplicaciones, el modelo de permisos y el almacenamiento de claves— para poder…</a:t>
             </a:r>
           </a:p>
         </p:txBody>
@@ -4092,7 +4603,7 @@
                   <a:srgbClr val="0B3D2E"/>
                 </a:solidFill>
               </a:rPr>
-              <a:t>📖 Definiciones y características</a:t>
+              <a:t>🧠 Explicación en profundidad</a:t>
             </a:r>
           </a:p>
         </p:txBody>
@@ -4130,82 +4641,52 @@
                   <a:srgbClr val="22282E"/>
                 </a:solidFill>
               </a:rPr>
-              <a:t>•  Sandbox de aplicación: cada app corre con un UID Linux único; el kernel impide que una acceda a los ficheros de otra. Característica clave: aislamiento por proceso, no por confianza en el código.</a:t>
-            </a:r>
-          </a:p>
-          <a:p>
-            <a:pPr>
-              <a:spcAft>
-                <a:spcPts val="600"/>
-              </a:spcAft>
-            </a:pPr>
-            <a:r>
-              <a:rPr sz="1500">
-                <a:solidFill>
-                  <a:srgbClr val="22282E"/>
-                </a:solidFill>
-              </a:rPr>
-              <a:t>•  SELinux (enforcing): control de acceso obligatorio (MAC) que confina incluso a root mediante políticas. Característica: reduce el impacto de una escalada.</a:t>
-            </a:r>
-          </a:p>
-          <a:p>
-            <a:pPr>
-              <a:spcAft>
-                <a:spcPts val="600"/>
-              </a:spcAft>
-            </a:pPr>
-            <a:r>
-              <a:rPr sz="1500">
-                <a:solidFill>
-                  <a:srgbClr val="22282E"/>
-                </a:solidFill>
-              </a:rPr>
-              <a:t>•  Permiso peligroso (dangerous): permiso que da acceso a datos privados (contactos, ubicación, cámara) y requiere consentimiento del usuario en runtime desde Android 6. Característica: revocable por el usuario.</a:t>
-            </a:r>
-          </a:p>
-          <a:p>
-            <a:pPr>
-              <a:spcAft>
-                <a:spcPts val="600"/>
-              </a:spcAft>
-            </a:pPr>
-            <a:r>
-              <a:rPr sz="1500">
-                <a:solidFill>
-                  <a:srgbClr val="22282E"/>
-                </a:solidFill>
-              </a:rPr>
-              <a:t>•  Android Keystore: almacén de claves respaldado por hardware (TEE/StrongBox) donde la clave nunca sale del entorno seguro. Característica: operaciones criptográficas sin exponer el material.</a:t>
-            </a:r>
-          </a:p>
-          <a:p>
-            <a:pPr>
-              <a:spcAft>
-                <a:spcPts val="600"/>
-              </a:spcAft>
-            </a:pPr>
-            <a:r>
-              <a:rPr sz="1500">
-                <a:solidFill>
-                  <a:srgbClr val="22282E"/>
-                </a:solidFill>
-              </a:rPr>
-              <a:t>•  Content Provider: componente que expone datos estructurados vía URI content://. Característica: si está exported sin permisos, otras apps leen sus datos.</a:t>
-            </a:r>
-          </a:p>
-          <a:p>
-            <a:pPr>
-              <a:spcAft>
-                <a:spcPts val="600"/>
-              </a:spcAft>
-            </a:pPr>
-            <a:r>
-              <a:rPr sz="1500">
-                <a:solidFill>
-                  <a:srgbClr val="22282E"/>
-                </a:solidFill>
-              </a:rPr>
-              <a:t>•  APK signing (v2/v3): firma del paquete que garantiza que no fue alterado desde su publicación. Característica: la clave del desarrollador ancla la identidad de la app.</a:t>
+              <a:t>•  Android asigna normalmente un UID Linux distinto a cada aplicación. El kernel separa procesos y archivos; SELinux añade control obligatorio; el framework media permisos e IPC; y Verified Boot protege…</a:t>
+            </a:r>
+          </a:p>
+          <a:p>
+            <a:pPr>
+              <a:spcAft>
+                <a:spcPts val="600"/>
+              </a:spcAft>
+            </a:pPr>
+            <a:r>
+              <a:rPr sz="1500">
+                <a:solidFill>
+                  <a:srgbClr val="22282E"/>
+                </a:solidFill>
+              </a:rPr>
+              <a:t>•  Una Activity, Service, BroadcastReceiver o ContentProvider puede abrir una frontera mediante Binder. Declarar un permiso no basta si el componente queda exportado sin necesidad o confía en datos del…</a:t>
+            </a:r>
+          </a:p>
+          <a:p>
+            <a:pPr>
+              <a:spcAft>
+                <a:spcPts val="600"/>
+              </a:spcAft>
+            </a:pPr>
+            <a:r>
+              <a:rPr sz="1500">
+                <a:solidFill>
+                  <a:srgbClr val="22282E"/>
+                </a:solidFill>
+              </a:rPr>
+              <a:t>•  Keystore permite crear claves no exportables y, según dispositivo y configuración, respaldadas por hardware. Esto no significa que todo dato cifrado quede seguro: el proceso autorizado puede pedir…</a:t>
+            </a:r>
+          </a:p>
+          <a:p>
+            <a:pPr>
+              <a:spcAft>
+                <a:spcPts val="600"/>
+              </a:spcAft>
+            </a:pPr>
+            <a:r>
+              <a:rPr sz="1500">
+                <a:solidFill>
+                  <a:srgbClr val="22282E"/>
+                </a:solidFill>
+              </a:rPr>
+              <a:t>•  Una app guarda informes en su directorio privado, pero exporta un ContentProvider que acepta cualquier identificador. El sandbox funciona exactamente como fue diseñado: otra app no lee archivos…</a:t>
             </a:r>
           </a:p>
         </p:txBody>
@@ -4256,7 +4737,7 @@
                   <a:srgbClr val="0B3D2E"/>
                 </a:solidFill>
               </a:rPr>
-              <a:t>🧰 Herramientas y preparación</a:t>
+              <a:t>📔 Glosario operativo</a:t>
             </a:r>
           </a:p>
         </p:txBody>
@@ -4294,97 +4775,82 @@
                   <a:srgbClr val="22282E"/>
                 </a:solidFill>
               </a:rPr>
-              <a:t>•  Android Studio + AVD (emulador) o un dispositivo físico de pruebas de tu propiedad.</a:t>
-            </a:r>
-          </a:p>
-          <a:p>
-            <a:pPr>
-              <a:spcAft>
-                <a:spcPts val="600"/>
-              </a:spcAft>
-            </a:pPr>
-            <a:r>
-              <a:rPr sz="1500">
-                <a:solidFill>
-                  <a:srgbClr val="22282E"/>
-                </a:solidFill>
-              </a:rPr>
-              <a:t>•  adb (Android Debug Bridge), incluido en platform-tools.</a:t>
-            </a:r>
-          </a:p>
-          <a:p>
-            <a:pPr>
-              <a:spcAft>
-                <a:spcPts val="600"/>
-              </a:spcAft>
-            </a:pPr>
-            <a:r>
-              <a:rPr sz="1500">
-                <a:solidFill>
-                  <a:srgbClr val="22282E"/>
-                </a:solidFill>
-              </a:rPr>
-              <a:t>•  Emulador con imagen Google APIs (no Play Store) para obtener acceso root fácilmente.</a:t>
-            </a:r>
-          </a:p>
-          <a:p>
-            <a:pPr>
-              <a:spcAft>
-                <a:spcPts val="600"/>
-              </a:spcAft>
-            </a:pPr>
-            <a:r>
-              <a:rPr sz="1500">
-                <a:solidFill>
-                  <a:srgbClr val="22282E"/>
-                </a:solidFill>
-              </a:rPr>
-              <a:t>•  Opcional: dispositivo con Magisk para root en hardware real, solo en equipo propio.</a:t>
-            </a:r>
-          </a:p>
-          <a:p>
-            <a:pPr>
-              <a:spcAft>
-                <a:spcPts val="600"/>
-              </a:spcAft>
-            </a:pPr>
-            <a:r>
-              <a:rPr sz="1500">
-                <a:solidFill>
-                  <a:srgbClr val="22282E"/>
-                </a:solidFill>
-              </a:rPr>
-              <a:t>•  adb devices</a:t>
-            </a:r>
-          </a:p>
-          <a:p>
-            <a:pPr>
-              <a:spcAft>
-                <a:spcPts val="600"/>
-              </a:spcAft>
-            </a:pPr>
-            <a:r>
-              <a:rPr sz="1500">
-                <a:solidFill>
-                  <a:srgbClr val="22282E"/>
-                </a:solidFill>
-              </a:rPr>
-              <a:t>•  adb shell getprop ro.build.version.sdk       # nivel de API</a:t>
-            </a:r>
-          </a:p>
-          <a:p>
-            <a:pPr>
-              <a:spcAft>
-                <a:spcPts val="600"/>
-              </a:spcAft>
-            </a:pPr>
-            <a:r>
-              <a:rPr sz="1500">
-                <a:solidFill>
-                  <a:srgbClr val="22282E"/>
-                </a:solidFill>
-              </a:rPr>
-              <a:t>•  adb shell getenforce                          # estado de SELinux (Enforcing/Permissive)</a:t>
+              <a:t>•  Término — Definición útil</a:t>
+            </a:r>
+          </a:p>
+          <a:p>
+            <a:pPr>
+              <a:spcAft>
+                <a:spcPts val="600"/>
+              </a:spcAft>
+            </a:pPr>
+            <a:r>
+              <a:rPr sz="1500">
+                <a:solidFill>
+                  <a:srgbClr val="22282E"/>
+                </a:solidFill>
+              </a:rPr>
+              <a:t>•  UID de aplicación — Identidad Linux usada para aislar procesos y archivos.</a:t>
+            </a:r>
+          </a:p>
+          <a:p>
+            <a:pPr>
+              <a:spcAft>
+                <a:spcPts val="600"/>
+              </a:spcAft>
+            </a:pPr>
+            <a:r>
+              <a:rPr sz="1500">
+                <a:solidFill>
+                  <a:srgbClr val="22282E"/>
+                </a:solidFill>
+              </a:rPr>
+              <a:t>•  Binder — Mecanismo principal de IPC en Android.</a:t>
+            </a:r>
+          </a:p>
+          <a:p>
+            <a:pPr>
+              <a:spcAft>
+                <a:spcPts val="600"/>
+              </a:spcAft>
+            </a:pPr>
+            <a:r>
+              <a:rPr sz="1500">
+                <a:solidFill>
+                  <a:srgbClr val="22282E"/>
+                </a:solidFill>
+              </a:rPr>
+              <a:t>•  Componente exportado — Punto de entrada accesible desde otras aplicaciones según manifiesto y permisos.</a:t>
+            </a:r>
+          </a:p>
+          <a:p>
+            <a:pPr>
+              <a:spcAft>
+                <a:spcPts val="600"/>
+              </a:spcAft>
+            </a:pPr>
+            <a:r>
+              <a:rPr sz="1500">
+                <a:solidFill>
+                  <a:srgbClr val="22282E"/>
+                </a:solidFill>
+              </a:rPr>
+              <a:t>•  Verified Boot — Cadena de verificación de integridad de componentes de arranque.</a:t>
+            </a:r>
+          </a:p>
+          <a:p>
+            <a:pPr>
+              <a:spcAft>
+                <a:spcPts val="600"/>
+              </a:spcAft>
+            </a:pPr>
+            <a:r>
+              <a:rPr sz="1500">
+                <a:solidFill>
+                  <a:srgbClr val="22282E"/>
+                </a:solidFill>
+              </a:rPr>
+              <a:t>•  Keystore — Servicio para claves y operaciones criptográficas con opciones de respaldo hardware.</a:t>
             </a:r>
           </a:p>
         </p:txBody>
@@ -4435,7 +4901,7 @@
                   <a:srgbClr val="0B3D2E"/>
                 </a:solidFill>
               </a:rPr>
-              <a:t>🧪 Laboratorio guiado</a:t>
+              <a:t>✅ Criterio de dominio</a:t>
             </a:r>
           </a:p>
         </p:txBody>
@@ -4473,97 +4939,7 @@
                   <a:srgbClr val="22282E"/>
                 </a:solidFill>
               </a:rPr>
-              <a:t>•  Levanta un AVD con API 30+ e imagen Google APIs. Arráncalo desde Android Studio o con emulator -avd &lt;nombre&gt; -writable-system.</a:t>
-            </a:r>
-          </a:p>
-          <a:p>
-            <a:pPr>
-              <a:spcAft>
-                <a:spcPts val="600"/>
-              </a:spcAft>
-            </a:pPr>
-            <a:r>
-              <a:rPr sz="1500">
-                <a:solidFill>
-                  <a:srgbClr val="22282E"/>
-                </a:solidFill>
-              </a:rPr>
-              <a:t>•  Inspecciona el sandbox: instala una app de prueba y localiza su UID: adb shell pm list packages -U | grep &lt;paquete&gt;. Observa que su directorio /data/data/&lt;paquete&gt; no es legible por otras apps.</a:t>
-            </a:r>
-          </a:p>
-          <a:p>
-            <a:pPr>
-              <a:spcAft>
-                <a:spcPts val="600"/>
-              </a:spcAft>
-            </a:pPr>
-            <a:r>
-              <a:rPr sz="1500">
-                <a:solidFill>
-                  <a:srgbClr val="22282E"/>
-                </a:solidFill>
-              </a:rPr>
-              <a:t>•  Revisa SELinux: ejecuta adb shell getenforce. Consulta el contexto de un proceso con adb shell ps -Z.</a:t>
-            </a:r>
-          </a:p>
-          <a:p>
-            <a:pPr>
-              <a:spcAft>
-                <a:spcPts val="600"/>
-              </a:spcAft>
-            </a:pPr>
-            <a:r>
-              <a:rPr sz="1500">
-                <a:solidFill>
-                  <a:srgbClr val="22282E"/>
-                </a:solidFill>
-              </a:rPr>
-              <a:t>•  Enumera permisos de una app instalada: adb shell dumpsys package &lt;paquete&gt; | sed -n '/requested permissions/,/install permissions/p'.</a:t>
-            </a:r>
-          </a:p>
-          <a:p>
-            <a:pPr>
-              <a:spcAft>
-                <a:spcPts val="600"/>
-              </a:spcAft>
-            </a:pPr>
-            <a:r>
-              <a:rPr sz="1500">
-                <a:solidFill>
-                  <a:srgbClr val="22282E"/>
-                </a:solidFill>
-              </a:rPr>
-              <a:t>•  Examina componentes exportados: extrae el APK (adb shell pm path &lt;paquete&gt; + adb pull) y ábrelo con aapt dump xmltree base.apk AndroidManifest.xml buscando android:exported="true".</a:t>
-            </a:r>
-          </a:p>
-          <a:p>
-            <a:pPr>
-              <a:spcAft>
-                <a:spcPts val="600"/>
-              </a:spcAft>
-            </a:pPr>
-            <a:r>
-              <a:rPr sz="1500">
-                <a:solidFill>
-                  <a:srgbClr val="22282E"/>
-                </a:solidFill>
-              </a:rPr>
-              <a:t>•  Explora el Keystore: con una app de ejemplo que genere una clave, observa que el material no aparece en el sistema de ficheros de la app.</a:t>
-            </a:r>
-          </a:p>
-          <a:p>
-            <a:pPr>
-              <a:spcAft>
-                <a:spcPts val="600"/>
-              </a:spcAft>
-            </a:pPr>
-            <a:r>
-              <a:rPr sz="1500">
-                <a:solidFill>
-                  <a:srgbClr val="22282E"/>
-                </a:solidFill>
-              </a:rPr>
-              <a:t>•  Rootea el emulador: adb root (en imágenes de ingeniería) y comprueba cómo ahora adb shell accede a /data/data/ de cualquier app: constata que el root anula el sandbox.</a:t>
+              <a:t>•  El alumno domina la arquitectura cuando sigue una solicitud desde otra app hasta el recurso, identifica qué capa decide, explica los límites de sandbox y Keystore y propone una prueba verificable…</a:t>
             </a:r>
           </a:p>
         </p:txBody>
@@ -4614,7 +4990,7 @@
                   <a:srgbClr val="0B3D2E"/>
                 </a:solidFill>
               </a:rPr>
-              <a:t>✍️ Ejercicios</a:t>
+              <a:t>📖 Definiciones y características</a:t>
             </a:r>
           </a:p>
         </p:txBody>
@@ -4652,82 +5028,82 @@
                   <a:srgbClr val="22282E"/>
                 </a:solidFill>
               </a:rPr>
-              <a:t>•  Dibuja un diagrama de la pila Android indicando en qué capa vive cada control de seguridad.</a:t>
-            </a:r>
-          </a:p>
-          <a:p>
-            <a:pPr>
-              <a:spcAft>
-                <a:spcPts val="600"/>
-              </a:spcAft>
-            </a:pPr>
-            <a:r>
-              <a:rPr sz="1500">
-                <a:solidFill>
-                  <a:srgbClr val="22282E"/>
-                </a:solidFill>
-              </a:rPr>
-              <a:t>•  Lista cinco permisos "peligrosos" y explica qué dato o hardware protege cada uno.</a:t>
-            </a:r>
-          </a:p>
-          <a:p>
-            <a:pPr>
-              <a:spcAft>
-                <a:spcPts val="600"/>
-              </a:spcAft>
-            </a:pPr>
-            <a:r>
-              <a:rPr sz="1500">
-                <a:solidFill>
-                  <a:srgbClr val="22282E"/>
-                </a:solidFill>
-              </a:rPr>
-              <a:t>•  Compara SharedPreferences en claro vs. EncryptedSharedPreferences y di cuándo usar cada uno.</a:t>
-            </a:r>
-          </a:p>
-          <a:p>
-            <a:pPr>
-              <a:spcAft>
-                <a:spcPts val="600"/>
-              </a:spcAft>
-            </a:pPr>
-            <a:r>
-              <a:rPr sz="1500">
-                <a:solidFill>
-                  <a:srgbClr val="22282E"/>
-                </a:solidFill>
-              </a:rPr>
-              <a:t>•  Identifica en un APK real (propio) todos los componentes exported y clasifica su riesgo.</a:t>
-            </a:r>
-          </a:p>
-          <a:p>
-            <a:pPr>
-              <a:spcAft>
-                <a:spcPts val="600"/>
-              </a:spcAft>
-            </a:pPr>
-            <a:r>
-              <a:rPr sz="1500">
-                <a:solidFill>
-                  <a:srgbClr val="22282E"/>
-                </a:solidFill>
-              </a:rPr>
-              <a:t>•  Explica con tus palabras por qué SELinux mitiga una vulnerabilidad de escalada a root.</a:t>
-            </a:r>
-          </a:p>
-          <a:p>
-            <a:pPr>
-              <a:spcAft>
-                <a:spcPts val="600"/>
-              </a:spcAft>
-            </a:pPr>
-            <a:r>
-              <a:rPr sz="1500">
-                <a:solidFill>
-                  <a:srgbClr val="22282E"/>
-                </a:solidFill>
-              </a:rPr>
-              <a:t>•  Investiga la diferencia entre TEE y StrongBox para el respaldo del Keystore.</a:t>
+              <a:t>•  Sandbox de aplicación: cada app corre con un UID Linux único; el kernel impide que una acceda a los ficheros de otra. Característica clave: aislamiento por proceso, no por confianza en el código.</a:t>
+            </a:r>
+          </a:p>
+          <a:p>
+            <a:pPr>
+              <a:spcAft>
+                <a:spcPts val="600"/>
+              </a:spcAft>
+            </a:pPr>
+            <a:r>
+              <a:rPr sz="1500">
+                <a:solidFill>
+                  <a:srgbClr val="22282E"/>
+                </a:solidFill>
+              </a:rPr>
+              <a:t>•  SELinux (enforcing): control de acceso obligatorio (MAC) que confina incluso a root mediante políticas. Característica: reduce el impacto de una escalada.</a:t>
+            </a:r>
+          </a:p>
+          <a:p>
+            <a:pPr>
+              <a:spcAft>
+                <a:spcPts val="600"/>
+              </a:spcAft>
+            </a:pPr>
+            <a:r>
+              <a:rPr sz="1500">
+                <a:solidFill>
+                  <a:srgbClr val="22282E"/>
+                </a:solidFill>
+              </a:rPr>
+              <a:t>•  Permiso peligroso (dangerous): permiso que da acceso a datos privados (contactos, ubicación, cámara) y requiere consentimiento del usuario en runtime desde Android 6. Característica: revocable por el…</a:t>
+            </a:r>
+          </a:p>
+          <a:p>
+            <a:pPr>
+              <a:spcAft>
+                <a:spcPts val="600"/>
+              </a:spcAft>
+            </a:pPr>
+            <a:r>
+              <a:rPr sz="1500">
+                <a:solidFill>
+                  <a:srgbClr val="22282E"/>
+                </a:solidFill>
+              </a:rPr>
+              <a:t>•  Android Keystore: servicio para crear y usar claves con restricciones; algunas pueden estar respaldadas por TEE o StrongBox. Característica: el material configurado como no exportable se usa mediante…</a:t>
+            </a:r>
+          </a:p>
+          <a:p>
+            <a:pPr>
+              <a:spcAft>
+                <a:spcPts val="600"/>
+              </a:spcAft>
+            </a:pPr>
+            <a:r>
+              <a:rPr sz="1500">
+                <a:solidFill>
+                  <a:srgbClr val="22282E"/>
+                </a:solidFill>
+              </a:rPr>
+              <a:t>•  Content Provider: componente que expone datos estructurados vía URI content://. Característica: si está exported sin permisos, otras apps leen sus datos.</a:t>
+            </a:r>
+          </a:p>
+          <a:p>
+            <a:pPr>
+              <a:spcAft>
+                <a:spcPts val="600"/>
+              </a:spcAft>
+            </a:pPr>
+            <a:r>
+              <a:rPr sz="1500">
+                <a:solidFill>
+                  <a:srgbClr val="22282E"/>
+                </a:solidFill>
+              </a:rPr>
+              <a:t>•  APK signing (v2/v3): firma del paquete que garantiza que no fue alterado desde su publicación. Característica: la clave del desarrollador ancla la identidad de la app.</a:t>
             </a:r>
           </a:p>
         </p:txBody>
@@ -4778,7 +5154,7 @@
                   <a:srgbClr val="0B3D2E"/>
                 </a:solidFill>
               </a:rPr>
-              <a:t>📝 Reto verificable</a:t>
+              <a:t>🧰 Herramientas y preparación</a:t>
             </a:r>
           </a:p>
         </p:txBody>
@@ -4816,7 +5192,52 @@
                   <a:srgbClr val="22282E"/>
                 </a:solidFill>
               </a:rPr>
-              <a:t>•  Toma una app de prueba (por ejemplo, una que tú compiles) y produce un inventario de superficie de ataque local: tabla con todos sus componentes, su estado exported, permisos requeridos y dónde guarda datos. Criterio de aceptación: el inventario identifica al menos un Content Provider o Activity exportada y justifica si representa o no un riesgo, citando la evidencia extraída del manifiesto.</a:t>
+              <a:t>•  Android Studio + AVD (emulador) o un dispositivo físico de pruebas de tu propiedad.</a:t>
+            </a:r>
+          </a:p>
+          <a:p>
+            <a:pPr>
+              <a:spcAft>
+                <a:spcPts val="600"/>
+              </a:spcAft>
+            </a:pPr>
+            <a:r>
+              <a:rPr sz="1500">
+                <a:solidFill>
+                  <a:srgbClr val="22282E"/>
+                </a:solidFill>
+              </a:rPr>
+              <a:t>•  adb (Android Debug Bridge), incluido en platform-tools.</a:t>
+            </a:r>
+          </a:p>
+          <a:p>
+            <a:pPr>
+              <a:spcAft>
+                <a:spcPts val="600"/>
+              </a:spcAft>
+            </a:pPr>
+            <a:r>
+              <a:rPr sz="1500">
+                <a:solidFill>
+                  <a:srgbClr val="22282E"/>
+                </a:solidFill>
+              </a:rPr>
+              <a:t>•  Emulador con imagen Google APIs (no Play Store) para obtener acceso root fácilmente.</a:t>
+            </a:r>
+          </a:p>
+          <a:p>
+            <a:pPr>
+              <a:spcAft>
+                <a:spcPts val="600"/>
+              </a:spcAft>
+            </a:pPr>
+            <a:r>
+              <a:rPr sz="1500">
+                <a:solidFill>
+                  <a:srgbClr val="22282E"/>
+                </a:solidFill>
+              </a:rPr>
+              <a:t>•  Opcional: dispositivo con Magisk para root en hardware real, solo en equipo propio.</a:t>
             </a:r>
           </a:p>
         </p:txBody>
